--- a/verification/slides/pyMack_validation.pptx
+++ b/verification/slides/pyMack_validation.pptx
@@ -9796,7 +9796,7 @@
                 <a:ea typeface="Calibri" pitchFamily="34" charset="-122"/>
                 <a:cs typeface="Calibri" pitchFamily="34" charset="-120"/>
               </a:rPr>
-              <a:t>full-contour match: robust branches median 50.2%; second_upper 6%(74%cov); second_lower 62%(77%cov); first_upper 95%(85%cov); first_lower 53%(85%cov)</a:t>
+              <a:t>full-contour match: robust branches median 50.0%; second_upper 5%(84%cov); second_lower 62%(77%cov); first_upper 95%(85%cov); first_lower 53%(85%cov)</a:t>
             </a:r>
             <a:endParaRPr lang="en-US" sz="950" dirty="0"/>
           </a:p>
@@ -10668,7 +10668,7 @@
                 <a:ea typeface="Calibri" pitchFamily="34" charset="-122"/>
                 <a:cs typeface="Calibri" pitchFamily="34" charset="-120"/>
               </a:rPr>
-              <a:t>full-contour match: robust branches median 1.3%; first_upper 1%(17%cov); first_lower 138%(17%cov)</a:t>
+              <a:t>full-contour match: robust branches median 8.0%; first_upper 8%(100%cov); first_lower 7%(100%cov)</a:t>
             </a:r>
             <a:endParaRPr lang="en-US" sz="950" dirty="0"/>
           </a:p>
@@ -14875,7 +14875,7 @@
                 <a:ea typeface="Calibri" pitchFamily="34" charset="-122"/>
                 <a:cs typeface="Calibri" pitchFamily="34" charset="-120"/>
               </a:rPr>
-              <a:t>full-contour match: robust branches median 48.3%; second_upper 2%(54%cov); second_lower 59%(67%cov); first_upper 94%(42%cov); first_lower 20%(75%cov)</a:t>
+              <a:t>full-contour match: robust branches median 48.1%; second_upper 2%(77%cov); second_lower 58%(83%cov); first_upper 94%(42%cov); first_lower 20%(75%cov)</a:t>
             </a:r>
             <a:endParaRPr lang="en-US" sz="950" dirty="0"/>
           </a:p>
@@ -15747,7 +15747,7 @@
                 <a:ea typeface="Calibri" pitchFamily="34" charset="-122"/>
                 <a:cs typeface="Calibri" pitchFamily="34" charset="-120"/>
               </a:rPr>
-              <a:t>full-contour match: robust branches median 48.0%; second_upper 4%(45%cov); second_lower 80%(45%cov); first_upper 92%(45%cov); first_lower 51%(73%cov)</a:t>
+              <a:t>full-contour match: robust branches median 44.7%; second_upper 4%(64%cov); second_lower 72%(64%cov); first_upper 86%(64%cov); first_lower 51%(73%cov)</a:t>
             </a:r>
             <a:endParaRPr lang="en-US" sz="950" dirty="0"/>
           </a:p>

--- a/verification/slides/pyMack_validation.pptx
+++ b/verification/slides/pyMack_validation.pptx
@@ -4927,8 +4927,8 @@
         </p:nvSpPr>
         <p:spPr>
           <a:xfrm>
-            <a:off x="807043" y="1298448"/>
-            <a:ext cx="6341194" cy="5029200"/>
+            <a:off x="816571" y="1298448"/>
+            <a:ext cx="6322139" cy="5029200"/>
           </a:xfrm>
           <a:prstGeom prst="roundRect">
             <a:avLst>
@@ -4969,8 +4969,8 @@
         </p:blipFill>
         <p:spPr>
           <a:xfrm>
-            <a:off x="953347" y="1444752"/>
-            <a:ext cx="6048586" cy="4736592"/>
+            <a:off x="962875" y="1444752"/>
+            <a:ext cx="6029531" cy="4736592"/>
           </a:xfrm>
           <a:prstGeom prst="rect">
             <a:avLst/>
@@ -5762,12 +5762,12 @@
         </p:nvSpPr>
         <p:spPr>
           <a:xfrm>
-            <a:off x="796957" y="1298448"/>
-            <a:ext cx="6361367" cy="5029200"/>
+            <a:off x="457200" y="1542288"/>
+            <a:ext cx="7040880" cy="4541520"/>
           </a:xfrm>
           <a:prstGeom prst="roundRect">
             <a:avLst>
-              <a:gd name="adj" fmla="val 909"/>
+              <a:gd name="adj" fmla="val 1007"/>
             </a:avLst>
           </a:prstGeom>
           <a:solidFill>
@@ -5804,8 +5804,8 @@
         </p:blipFill>
         <p:spPr>
           <a:xfrm>
-            <a:off x="943261" y="1444752"/>
-            <a:ext cx="6068759" cy="4736592"/>
+            <a:off x="603504" y="1688592"/>
+            <a:ext cx="6748272" cy="4248912"/>
           </a:xfrm>
           <a:prstGeom prst="rect">
             <a:avLst/>
@@ -16265,12 +16265,12 @@
         </p:nvSpPr>
         <p:spPr>
           <a:xfrm>
-            <a:off x="457200" y="1316899"/>
-            <a:ext cx="7040880" cy="4992297"/>
+            <a:off x="457200" y="1337826"/>
+            <a:ext cx="7040880" cy="4950443"/>
           </a:xfrm>
           <a:prstGeom prst="roundRect">
             <a:avLst>
-              <a:gd name="adj" fmla="val 916"/>
+              <a:gd name="adj" fmla="val 924"/>
             </a:avLst>
           </a:prstGeom>
           <a:solidFill>
@@ -16307,8 +16307,8 @@
         </p:blipFill>
         <p:spPr>
           <a:xfrm>
-            <a:off x="603504" y="1463203"/>
-            <a:ext cx="6748272" cy="4699689"/>
+            <a:off x="603504" y="1484130"/>
+            <a:ext cx="6748272" cy="4657835"/>
           </a:xfrm>
           <a:prstGeom prst="rect">
             <a:avLst/>
@@ -17137,8 +17137,8 @@
         </p:nvSpPr>
         <p:spPr>
           <a:xfrm>
-            <a:off x="807043" y="1298448"/>
-            <a:ext cx="6341194" cy="5029200"/>
+            <a:off x="816571" y="1298448"/>
+            <a:ext cx="6322139" cy="5029200"/>
           </a:xfrm>
           <a:prstGeom prst="roundRect">
             <a:avLst>
@@ -17179,8 +17179,8 @@
         </p:blipFill>
         <p:spPr>
           <a:xfrm>
-            <a:off x="953347" y="1444752"/>
-            <a:ext cx="6048586" cy="4736592"/>
+            <a:off x="962875" y="1444752"/>
+            <a:ext cx="6029531" cy="4736592"/>
           </a:xfrm>
           <a:prstGeom prst="rect">
             <a:avLst/>
@@ -17972,12 +17972,12 @@
         </p:nvSpPr>
         <p:spPr>
           <a:xfrm>
-            <a:off x="457200" y="2237187"/>
-            <a:ext cx="7040880" cy="3151723"/>
+            <a:off x="457200" y="2244062"/>
+            <a:ext cx="7040880" cy="3137972"/>
           </a:xfrm>
           <a:prstGeom prst="roundRect">
             <a:avLst>
-              <a:gd name="adj" fmla="val 1451"/>
+              <a:gd name="adj" fmla="val 1457"/>
             </a:avLst>
           </a:prstGeom>
           <a:solidFill>
@@ -18014,8 +18014,8 @@
         </p:blipFill>
         <p:spPr>
           <a:xfrm>
-            <a:off x="603504" y="2383491"/>
-            <a:ext cx="6748272" cy="2859115"/>
+            <a:off x="603504" y="2390366"/>
+            <a:ext cx="6748272" cy="2845364"/>
           </a:xfrm>
           <a:prstGeom prst="rect">
             <a:avLst/>
@@ -18733,12 +18733,12 @@
         </p:nvSpPr>
         <p:spPr>
           <a:xfrm>
-            <a:off x="457200" y="1388578"/>
-            <a:ext cx="7040880" cy="4848940"/>
+            <a:off x="457200" y="1401574"/>
+            <a:ext cx="7040880" cy="4822948"/>
           </a:xfrm>
           <a:prstGeom prst="roundRect">
             <a:avLst>
-              <a:gd name="adj" fmla="val 943"/>
+              <a:gd name="adj" fmla="val 948"/>
             </a:avLst>
           </a:prstGeom>
           <a:solidFill>
@@ -18775,8 +18775,8 @@
         </p:blipFill>
         <p:spPr>
           <a:xfrm>
-            <a:off x="603504" y="1534882"/>
-            <a:ext cx="6748272" cy="4556332"/>
+            <a:off x="603504" y="1547878"/>
+            <a:ext cx="6748272" cy="4530340"/>
           </a:xfrm>
           <a:prstGeom prst="rect">
             <a:avLst/>
